--- a/docs/politehnika/prezentaciya.pptx
+++ b/docs/politehnika/prezentaciya.pptx
@@ -509,7 +509,7 @@
           <a:p>
             <a:r>
               <a:rPr lang="en-US" dirty="0"/>
-              <a:t>Добрый день. Мы сделали интерактивную модель интерферометра Фабри — Перо и на её основе виртуальную лабораторную работу. Мы — Егор, Артём и Илья, группы ИБМ5-31Б и ИБМ2-32Б, проект СЭЛФ. Кольца на слайде — это не фотография, а картинка из нашей программы.</a:t>
+              <a:t>Добрый день! Нас зовут Егор, Артём и Илья, мы учимся в МГТУ имени Баумана, группы ИБМ5-31Б и ИБМ2-32Б. Наш проект выполнен в рамках СЭЛФ и посвящён интерферометру Фабри-Перо: мы построили его математическую модель и на её основе сделали виртуальную лабораторную работу. Кольца, которые вы видите на слайде, - это не фотография, а картинка, рассчитанная нашей моделью.</a:t>
             </a:r>
             <a:endParaRPr lang="en-US" dirty="0"/>
           </a:p>
@@ -597,7 +597,7 @@
           <a:p>
             <a:r>
               <a:rPr lang="en-US" dirty="0"/>
-              <a:t>Рассказывать мы будем со стороны природы света. Свет — волна: если сложить две волны так, что гребень попадает на впадину, получится темнота. В интерферометре свет многократно отражается между двумя зеркалами, и на экране видны светлые и тёмные кольца. По расстоянию между кольцами можно найти длину световой волны. Но настоящий прибор дорог, поэтому мы сделали его модель.</a:t>
+              <a:t>Рассказывать о проекте мы будем со стороны природы света. Свет - это волна, и у волн есть удивительное свойство: если сложить две волны так, чтобы гребень одной пришёлся на впадину другой, света не останется совсем. В интерферометре свет многократно отражается между двумя зеркалами, и на экране возникают светлые и тёмные кольца. По расстоянию между кольцами можно измерить длину световой волны, причём очень точно. Проблема в том, что настоящий прибор стоит дорого, и в учебных лабораториях он встречается редко. Поэтому мы решили создать его точную модель.</a:t>
             </a:r>
             <a:endParaRPr lang="en-US" dirty="0"/>
           </a:p>
@@ -685,7 +685,7 @@
           <a:p>
             <a:r>
               <a:rPr lang="en-US" dirty="0"/>
-              <a:t>Выведем формулу Эйри. Свет входит между двумя зеркалами и многократно отражается. Каждое отражение умножает амплитуду на корень из R, а соседние лучи отличаются по фазе на дельту: четыре пи n d косинус тэта на лямбда. Складываем бесконечную серию лучей — это геометрическая прогрессия, её сумма равна t квадрат делить на единица минус R на e в степени i дельта. Берём квадрат модуля и получаем формулу Эйри: пропускание T равно T-макс делить на единица плюс F синус квадрат дельта пополам, где F равно четыре R делить на единица минус R в квадрате. Максимум там, где дельта равна два пи m. Справа график: узкие острые пики.</a:t>
+              <a:t>Начнём с главного - выведем формулу Эйри. Свет попадает между двумя зеркалами и многократно отражается. При каждом отражении амплитуда умножается на корень из R, а соседние лучи отличаются по фазе на величину дельта, равную четыре пи n d косинус тэта, делённому на лямбда. Складываем бесконечную серию лучей. Это обычная геометрическая прогрессия, её сумма равна t в квадрате, делённому на единицу минус R на е в степени i дельта. Берём квадрат модуля и получаем формулу Эйри: пропускание T равно T-макс, делённому на единицу плюс F на синус квадрат дельта пополам, где F равно четыре R, делённому на единицу минус R в квадрате. Максимумы наблюдаются там, где дельта равна два пи m. На графике справа видны узкие острые пики, это именно те длины волн, которые прибор пропускает.</a:t>
             </a:r>
             <a:endParaRPr lang="en-US" dirty="0"/>
           </a:p>
@@ -773,7 +773,7 @@
           <a:p>
             <a:r>
               <a:rPr lang="en-US" dirty="0"/>
-              <a:t>Из формулы Эйри получаются все характеристики прибора. Расстояние между соседними пиками — область свободной дисперсии — равна лямбда квадрат делить на два n d. Для He-Ne лазера с зазором пять миллиметров это 40 пикометров. Ширина пика — около 1,3 пикометра. Отношение этих величин — резкость — примерно пи корень из R делить на единица минус R, это около 30. И разрешающая способность лямбда делить на ширину пика — около 470 тысяч. Две спектральные линии считаются различимыми, если яркость посередине между ними не больше 0,81 от максимума. Это тот же провал, что у критерия Рэлея для дифракционной решётки, и для пиков Эйри он получается при разности длин волн чуть больше ширины пика, около 1,03 w.</a:t>
+              <a:t>Из формулы Эйри следуют все характеристики прибора. Расстояние между соседними пиками, то есть область свободной дисперсии, равно лямбда в квадрате, делённому на два n d. Для He-Ne лазера при зазоре в пять миллиметров это около сорока пикометров. Ширина самого пика составляет примерно один и три десятых пикометра. Отношение этих величин называется резкостью, она равна примерно пи корень из R, делённому на единицу минус R, то есть около тридцати. Разрешающая способность, лямбда делить на ширину пика, получается около четырёхсот семидесяти тысяч. Две спектральные линии мы считаем различимыми, если яркость между ними не больше 0,81 от максимума. Это тот же провал, что и в критерии Рэлея для дифракционной решётки, и для пиков Эйри он достигается, когда разность длин волн немного превышает ширину пика, примерно в 1,03 раза.</a:t>
             </a:r>
             <a:endParaRPr lang="en-US" dirty="0"/>
           </a:p>
@@ -861,7 +861,7 @@
           <a:p>
             <a:r>
               <a:rPr lang="en-US" dirty="0"/>
-              <a:t>Свет идёт под разными углами, и линза собирает его в кольца. Условие светлого кольца — два n d косинус тэта равно m лямбда. Отсюда радиусы колец: r квадрат равно f квадрат n лямбда делить на d, умноженное на k минус единица плюс эпсилон, где эпсилон — дробная часть порядка в центре. Поэтому квадрат радиуса растёт линейно с номером кольца, а площади между соседними кольцами одинаковы — каждая равна пи f квадрат n лямбда делить на d. Наклон прямой зависимости r квадрат от k даёт длину волны. На картинках справа видно, как меняются кольца при отражении зеркал 0,5, 0,9 и 0,98: чем ближе R к единице, тем тоньше светлые кольца.</a:t>
+              <a:t>Теперь о том, откуда берутся кольца. Свет идёт под разными углами, а линза собирает лучи с одинаковым наклоном в одну окружность. Условие светлого кольца: два n d косинус тэта равно m лямбда. Отсюда получаем радиусы колец: r в квадрате равно f в квадрате n лямбда, делённому на d, умноженному на k минус единица плюс эпсилон. Здесь эпсилон - это дробная часть порядка интерференции в центре. Из этой формулы следует, что квадрат радиуса растёт линейно с номером кольца, а площади между соседними кольцами одинаковы и равны пи f в квадрате n лямбда, делённому на d. Наклон прямой r в квадрате от k позволяет найти длину волны. Справа показано, как меняются кольца при отражении зеркал 0,5, 0,9 и 0,98: чем ближе R к единице, тем тоньше светлые кольца.</a:t>
             </a:r>
             <a:endParaRPr lang="en-US" dirty="0"/>
           </a:p>
@@ -949,7 +949,7 @@
           <a:p>
             <a:r>
               <a:rPr lang="en-US" dirty="0"/>
-              <a:t>Мы разобрали допущения модели. Свет считаем монохроматическим, зеркала плоскими и параллельными. Малые углы: на краю экрана закон «квадрат радиуса пропорционален номеру кольца» нарушается всего на 0,2 процента. Поглощение зеркал снижает высоту пиков. Если экран стоит не в фокусе линзы, кольца размываются: при сдвиге на миллиметр кружок размытия 25 микрометров. Отдельный вопрос — что такое светлое пятно в центре: интерференция или дифракция. Это интерференция: разность хода между лучами близка к целому числу длин волн. Пятно Пуассона — дифракция на диске. Общее у них — сложение когерентных волн с учётом фаз.</a:t>
+              <a:t>Любая модель опирается на допущения, и мы разобрали каждое из них. Свет мы считаем монохроматическим, а зеркала плоскими и параллельными. Мы работаем в приближении малых углов, и на краю экрана закон «квадрат радиуса пропорционален номеру кольца» нарушается лишь на 0,2 процента. Поглощение зеркал снижает высоту пиков. Если экран стоит не в фокусе линзы, кольца размываются: при смещении на один миллиметр кружок размытия составляет 25 микрометров. Отдельный интересный вопрос - что такое светлое пятно в центре, интерференция или дифракция. Это интерференция: в центре разность хода между лучами близка к целому числу длин волн. Пятно Пуассона, в отличие от него, возникает из-за дифракции на диске. Общее у них одно: в обоих случаях складываются когерентные волны с учётом фаз.</a:t>
             </a:r>
             <a:endParaRPr lang="en-US" dirty="0"/>
           </a:p>
@@ -1037,7 +1037,7 @@
           <a:p>
             <a:r>
               <a:rPr lang="en-US" dirty="0"/>
-              <a:t>На этой физике мы построили лабораторную работу: длину волны можно найти тремя независимыми способами. Первый — по расстоянию между пиками: Дельта лямбда равно лямбда квадрат делить на два n d, поэтому график зависимости от единицы на d — прямая, наклон которой даёт лямбду. Второй — по радиусам колец: квадрат радиуса пропорционален номеру кольца. Третий — по сдвигу зеркала: каждые полдлины волны в центре появляется новое кольцо. Прямую проводим методом наименьших квадратов, погрешность оцениваем по коэффициенту Стьюдента. Пример: скрытая длина волны 454,6 нанометра, студент получил 456,7 плюс-минус 2,3, то есть ошибка около полупроцента. Справа — окно виртуальной лабораторной, в ней 7 заданий и 30 вариантов со скрытыми величинами.</a:t>
+              <a:t>На этой физике мы построили лабораторную работу, в которой длину волны можно найти тремя независимыми способами. Первый - по расстоянию между пиками. Так как дельта лямбда равна лямбда в квадрате, делённому на два n d, график зависимости от единицы на d даёт прямую, и по её наклону находится лямбда. Второй способ - по радиусам колец: квадрат радиуса пропорционален номеру кольца. Третий - по сдвигу зеркала: каждые полдлины волны в центре появляется новое кольцо. Прямую мы проводим методом наименьших квадратов, а погрешность оцениваем с помощью коэффициента Стьюдента. Например, при скрытой длине волны 454,6 нанометра студент получил 456,7 плюс-минус 2,3, то есть ошибка составила около полупроцента. Справа показано окно виртуальной лабораторной работы: в ней семь заданий и тридцать вариантов со скрытыми величинами.</a:t>
             </a:r>
             <a:endParaRPr lang="en-US" dirty="0"/>
           </a:p>
@@ -1125,7 +1125,7 @@
           <a:p>
             <a:r>
               <a:rPr lang="en-US" dirty="0"/>
-              <a:t>Как мы проверяли модель. Прямое сложение 800 отражённых лучей совпадает с формулой Эйри. Расчёты программы расходятся с точными формулами меньше чем на 0,1 процента, это проверяют 30 автоматических тестов. Модель реализована на Python и работает на Windows, macOS и Linux. Над проектом работали Артём, Егор и Илья. Дальше мы хотим проверить лабораторную на группе студентов и добавить интерферометры Майкельсона и Юнга. Спасибо за внимание.</a:t>
+              <a:t>Как мы убеждались в правильности модели. Во-первых, прямое сложение 800 отражённых лучей полностью совпадает с формулой Эйри. Во-вторых, расчёты программы расходятся с точными формулами менее чем на 0,1 процента, и это проверяют 30 автоматических тестов. Модель реализована на языке Python и работает на Windows, macOS и Linux. Над проектом работали три человека: Артём отвечал за физику, Егор - за визуализацию и обработку результатов, Илья - за программную часть. В дальнейшем мы хотим проверить лабораторную работу на целой группе студентов и добавить модели интерферометров Майкельсона и Юнга. Благодарим за внимание!</a:t>
             </a:r>
             <a:endParaRPr lang="en-US" dirty="0"/>
           </a:p>

--- a/docs/politehnika/prezentaciya.pptx
+++ b/docs/politehnika/prezentaciya.pptx
@@ -509,7 +509,7 @@
           <a:p>
             <a:r>
               <a:rPr lang="en-US" dirty="0"/>
-              <a:t>Добрый день! Нас зовут Егор, Артём и Илья, мы учимся в МГТУ имени Баумана, группы ИБМ5-31Б и ИБМ2-32Б. Наш проект выполнен в рамках СЭЛФ и посвящён интерферометру Фабри-Перо: мы построили его математическую модель и на её основе сделали виртуальную лабораторную работу. Кольца, которые вы видите на слайде, - это не фотография, а картинка, рассчитанная нашей моделью.</a:t>
+              <a:t>Здравствуйте. Нас зовут Егор Сидоренко, Артём Кузнецов и Илья Кадников, мы студенты МГТУ имени Баумана, группы ИБМ5-31Б и ИБМ2-32Б. Представляем проект, выполненный в рамках СЭЛФ: математическую модель интерферометра Фабри-Перо и виртуальную лабораторную работу, построенную на этой модели. Картина колец на слайде получена расчётом по нашей модели.</a:t>
             </a:r>
             <a:endParaRPr lang="en-US" dirty="0"/>
           </a:p>
@@ -597,7 +597,7 @@
           <a:p>
             <a:r>
               <a:rPr lang="en-US" dirty="0"/>
-              <a:t>Рассказывать о проекте мы будем со стороны природы света. Свет - это волна, и у волн есть удивительное свойство: если сложить две волны так, чтобы гребень одной пришёлся на впадину другой, света не останется совсем. В интерферометре свет многократно отражается между двумя зеркалами, и на экране возникают светлые и тёмные кольца. По расстоянию между кольцами можно измерить длину световой волны, причём очень точно. Проблема в том, что настоящий прибор стоит дорого, и в учебных лабораториях он встречается редко. Поэтому мы решили создать его точную модель.</a:t>
+              <a:t>Цель работы: построить математическую модель многолучевой интерференции в интерферометре Фабри-Перо и на её основе разработать методику измерения длины световой волны. Для этого поставлены четыре задачи. Первая: вывести формулу Эйри и получить из неё характеристики прибора. Вторая: получить закон радиусов колец равного наклона и доказать равенство площадей зон между соседними кольцами. Третья: определить границы применимости модели. Четвёртая: разработать три независимых способа измерения длины волны с обработкой методом наименьших квадратов. Актуальность определяется тем, что реальный интерферометр является дорогим прибором и редко доступен в учебных лабораториях, а модель позволяет изучить явление количественно.</a:t>
             </a:r>
             <a:endParaRPr lang="en-US" dirty="0"/>
           </a:p>
@@ -685,7 +685,7 @@
           <a:p>
             <a:r>
               <a:rPr lang="en-US" dirty="0"/>
-              <a:t>Начнём с главного - выведем формулу Эйри. Свет попадает между двумя зеркалами и многократно отражается. При каждом отражении амплитуда умножается на корень из R, а соседние лучи отличаются по фазе на величину дельта, равную четыре пи n d косинус тэта, делённому на лямбда. Складываем бесконечную серию лучей. Это обычная геометрическая прогрессия, её сумма равна t в квадрате, делённому на единицу минус R на е в степени i дельта. Берём квадрат модуля и получаем формулу Эйри: пропускание T равно T-макс, делённому на единицу плюс F на синус квадрат дельта пополам, где F равно четыре R, делённому на единицу минус R в квадрате. Максимумы наблюдаются там, где дельта равна два пи m. На графике справа видны узкие острые пики, это именно те длины волн, которые прибор пропускает.</a:t>
+              <a:t>Выведем формулу Эйри. Свет многократно отражается между двумя зеркалами. При каждом отражении амплитуда умножается на корень из R, а соседние лучи сдвинуты по фазе на величину дельта, равную четыре пи n d косинус тэта, делённому на лямбда. Амплитуда прошедшей волны есть сумма бесконечной геометрической прогрессии и равна t в квадрате, делённому на единицу минус R на е в степени i дельта. Интенсивность определяется квадратом модуля этой величины: T равно T-макс, делённому на единицу плюс F на синус квадрат дельта пополам, где F равно четыре R, делённому на единицу минус R в квадрате. Максимумы пропускания наблюдаются при дельта, равной два пи m. Справа приведён рассчитанный график пропускания.</a:t>
             </a:r>
             <a:endParaRPr lang="en-US" dirty="0"/>
           </a:p>
@@ -773,7 +773,7 @@
           <a:p>
             <a:r>
               <a:rPr lang="en-US" dirty="0"/>
-              <a:t>Из формулы Эйри следуют все характеристики прибора. Расстояние между соседними пиками, то есть область свободной дисперсии, равно лямбда в квадрате, делённому на два n d. Для He-Ne лазера при зазоре в пять миллиметров это около сорока пикометров. Ширина самого пика составляет примерно один и три десятых пикометра. Отношение этих величин называется резкостью, она равна примерно пи корень из R, делённому на единицу минус R, то есть около тридцати. Разрешающая способность, лямбда делить на ширину пика, получается около четырёхсот семидесяти тысяч. Две спектральные линии мы считаем различимыми, если яркость между ними не больше 0,81 от максимума. Это тот же провал, что и в критерии Рэлея для дифракционной решётки, и для пиков Эйри он достигается, когда разность длин волн немного превышает ширину пика, примерно в 1,03 раза.</a:t>
+              <a:t>Из формулы Эйри следуют все характеристики прибора. Область свободной дисперсии, то есть расстояние между соседними пиками, равна лямбда в квадрате, делённому на два n d. Для He-Ne лазера при зазоре пять миллиметров она составляет около сорока пикометров. Ширина пика равна приблизительно 1,3 пикометра. Их отношение, резкость, приближённо равно пи корень из R, делённому на единицу минус R, и составляет около тридцати. Разрешающая способность, равная отношению лямбда к ширине пика, достигает приблизительно 470 тысяч. Две спектральные линии считаются разрешёнными, если провал между ними не превышает 0,81 максимума. Это значение соответствует критерию Рэлея для дифракционной решётки. Для пиков Эйри оно достигается при разности длин волн, примерно в 1,03 раза превышающей ширину пика.</a:t>
             </a:r>
             <a:endParaRPr lang="en-US" dirty="0"/>
           </a:p>
@@ -861,7 +861,7 @@
           <a:p>
             <a:r>
               <a:rPr lang="en-US" dirty="0"/>
-              <a:t>Теперь о том, откуда берутся кольца. Свет идёт под разными углами, а линза собирает лучи с одинаковым наклоном в одну окружность. Условие светлого кольца: два n d косинус тэта равно m лямбда. Отсюда получаем радиусы колец: r в квадрате равно f в квадрате n лямбда, делённому на d, умноженному на k минус единица плюс эпсилон. Здесь эпсилон - это дробная часть порядка интерференции в центре. Из этой формулы следует, что квадрат радиуса растёт линейно с номером кольца, а площади между соседними кольцами одинаковы и равны пи f в квадрате n лямбда, делённому на d. Наклон прямой r в квадрате от k позволяет найти длину волны. Справа показано, как меняются кольца при отражении зеркал 0,5, 0,9 и 0,98: чем ближе R к единице, тем тоньше светлые кольца.</a:t>
+              <a:t>Кольца образуются потому, что линза собирает в одну окружность лучи с одинаковым углом наклона. Условие светлого кольца: два n d косинус тэта равно m лямбда. Для радиусов колец получаем: r в квадрате равно f в квадрате n лямбда, делённому на d, умноженному на k минус единица плюс эпсилон, где эпсилон - дробная часть порядка интерференции в центре. Следовательно, квадрат радиуса линейно зависит от номера кольца, а площади между соседними кольцами одинаковы и равны пи f в квадрате n лямбда, делённому на d. По наклону прямой r в квадрате от k определяется длина волны. Справа показано, как изменяется картина при коэффициенте отражения 0,5, 0,9 и 0,98: чем ближе R к единице, тем уже светлые кольца.</a:t>
             </a:r>
             <a:endParaRPr lang="en-US" dirty="0"/>
           </a:p>
@@ -949,7 +949,7 @@
           <a:p>
             <a:r>
               <a:rPr lang="en-US" dirty="0"/>
-              <a:t>Любая модель опирается на допущения, и мы разобрали каждое из них. Свет мы считаем монохроматическим, а зеркала плоскими и параллельными. Мы работаем в приближении малых углов, и на краю экрана закон «квадрат радиуса пропорционален номеру кольца» нарушается лишь на 0,2 процента. Поглощение зеркал снижает высоту пиков. Если экран стоит не в фокусе линзы, кольца размываются: при смещении на один миллиметр кружок размытия составляет 25 микрометров. Отдельный интересный вопрос - что такое светлое пятно в центре, интерференция или дифракция. Это интерференция: в центре разность хода между лучами близка к целому числу длин волн. Пятно Пуассона, в отличие от него, возникает из-за дифракции на диске. Общее у них одно: в обоих случаях складываются когерентные волны с учётом фаз.</a:t>
+              <a:t>Рассмотрим допущения модели. Излучение считается монохроматическим, зеркала плоскими и параллельными. Используется приближение малых углов: на краю экрана отклонение от закона «квадрат радиуса пропорционален номеру кольца» составляет 0,2 процента. Поглощение зеркал учитывается и снижает высоту пиков. Если экран расположен не в фокальной плоскости линзы, кольца размываются: при смещении на один миллиметр радиус кружка размытия равен 25 микрометрам. Отдельно рассмотрен вопрос о природе светлого пятна в центре картины. Это интерференция: в центре разность хода лучей близка к целому числу длин волн. Пятно Пуассона, напротив, является результатом дифракции на диске. Общее у обоих явлений состоит в том, что складываются когерентные волны с учётом их фаз.</a:t>
             </a:r>
             <a:endParaRPr lang="en-US" dirty="0"/>
           </a:p>
@@ -1037,7 +1037,7 @@
           <a:p>
             <a:r>
               <a:rPr lang="en-US" dirty="0"/>
-              <a:t>На этой физике мы построили лабораторную работу, в которой длину волны можно найти тремя независимыми способами. Первый - по расстоянию между пиками. Так как дельта лямбда равна лямбда в квадрате, делённому на два n d, график зависимости от единицы на d даёт прямую, и по её наклону находится лямбда. Второй способ - по радиусам колец: квадрат радиуса пропорционален номеру кольца. Третий - по сдвигу зеркала: каждые полдлины волны в центре появляется новое кольцо. Прямую мы проводим методом наименьших квадратов, а погрешность оцениваем с помощью коэффициента Стьюдента. Например, при скрытой длине волны 454,6 нанометра студент получил 456,7 плюс-минус 2,3, то есть ошибка составила около полупроцента. Справа показано окно виртуальной лабораторной работы: в ней семь заданий и тридцать вариантов со скрытыми величинами.</a:t>
+              <a:t>На основе модели разработана лабораторная работа, в которой длина волны определяется тремя независимыми способами. Первый способ: по расстоянию между пиками. Так как дельта лямбда равна лямбда в квадрате, делённому на два n d, график зависимости дельта лямбда от единицы на d является прямой, а её наклон определяет лямбда. Второй способ: по радиусам колец, квадрат радиуса пропорционален номеру кольца. Третий способ: по сдвигу зеркала, так как при смещении на половину длины волны в центре возникает новое кольцо. Прямые проводятся методом наименьших квадратов, погрешность оценивается с помощью коэффициента Стьюдента. В качестве примера: при скрытой длине волны 454,6 нанометра студент получил 456,7 плюс-минус 2,3, то есть относительная ошибка составила около 0,5 процента. Лабораторная работа включает семь заданий и тридцать вариантов со скрытыми величинами.</a:t>
             </a:r>
             <a:endParaRPr lang="en-US" dirty="0"/>
           </a:p>
@@ -1125,7 +1125,7 @@
           <a:p>
             <a:r>
               <a:rPr lang="en-US" dirty="0"/>
-              <a:t>Как мы убеждались в правильности модели. Во-первых, прямое сложение 800 отражённых лучей полностью совпадает с формулой Эйри. Во-вторых, расчёты программы расходятся с точными формулами менее чем на 0,1 процента, и это проверяют 30 автоматических тестов. Модель реализована на языке Python и работает на Windows, macOS и Linux. Над проектом работали три человека: Артём отвечал за физику, Егор - за визуализацию и обработку результатов, Илья - за программную часть. В дальнейшем мы хотим проверить лабораторную работу на целой группе студентов и добавить модели интерферометров Майкельсона и Юнга. Благодарим за внимание!</a:t>
+              <a:t>Правильность модели проверена несколькими способами. Прямое суммирование 800 отражённых лучей совпадает с формулой Эйри. Расчёты программы расходятся с точными формулами менее чем на 0,1 процента, что подтверждено 30 автоматическими тестами. Модель реализована на языке Python и работает на Windows, macOS и Linux. В работе принимали участие трое: Артём Кузнецов отвечал за физическую часть, Егор Сидоренко за визуализацию и обработку результатов, Илья Кадников за программную реализацию. В дальнейшем планируется апробация лабораторной работы в учебной группе и расширение модели интерферометрами Майкельсона и Юнга. Благодарим за внимание.</a:t>
             </a:r>
             <a:endParaRPr lang="en-US" dirty="0"/>
           </a:p>
@@ -1572,7 +1572,7 @@
                 <a:ea typeface="Cambria" pitchFamily="34" charset="-122"/>
                 <a:cs typeface="Cambria" pitchFamily="34" charset="-120"/>
               </a:rPr>
-              <a:t>Фабри — Перо</a:t>
+              <a:t>Фабри - Перо</a:t>
             </a:r>
             <a:endParaRPr lang="en-US" sz="4000" dirty="0"/>
           </a:p>
@@ -1760,7 +1760,7 @@
                 <a:ea typeface="Cambria" pitchFamily="34" charset="-122"/>
                 <a:cs typeface="Cambria" pitchFamily="34" charset="-120"/>
               </a:rPr>
-              <a:t>Зачем это нужно</a:t>
+              <a:t>Цель и задачи</a:t>
             </a:r>
             <a:endParaRPr lang="en-US" sz="3000" dirty="0"/>
           </a:p>
@@ -1774,12 +1774,12 @@
         </p:nvSpPr>
         <p:spPr>
           <a:xfrm>
-            <a:off x="457200" y="1234440"/>
-            <a:ext cx="2606040" cy="3200400"/>
+            <a:off x="457200" y="1143000"/>
+            <a:ext cx="3566160" cy="3246120"/>
           </a:xfrm>
           <a:prstGeom prst="roundRect">
             <a:avLst>
-              <a:gd name="adj" fmla="val 4211"/>
+              <a:gd name="adj" fmla="val 3380"/>
             </a:avLst>
           </a:prstGeom>
           <a:solidFill>
@@ -1795,14 +1795,92 @@
       </p:sp>
       <p:sp>
         <p:nvSpPr>
-          <p:cNvPr id="4" name="Shape 2"/>
+          <p:cNvPr id="4" name="Text 2"/>
+          <p:cNvSpPr txBox="1"/>
+          <p:nvPr/>
+        </p:nvSpPr>
+        <p:spPr>
+          <a:xfrm>
+            <a:off x="685800" y="1280160"/>
+            <a:ext cx="3108960" cy="365760"/>
+          </a:xfrm>
+          <a:prstGeom prst="rect">
+            <a:avLst/>
+          </a:prstGeom>
+          <a:noFill/>
+          <a:ln/>
+        </p:spPr>
+        <p:txBody>
+          <a:bodyPr wrap="square" lIns="0" tIns="0" rIns="0" bIns="0" rtlCol="0" anchor="ctr"/>
+          <a:lstStyle/>
+          <a:p>
+            <a:pPr indent="0" marL="0">
+              <a:buNone/>
+            </a:pPr>
+            <a:r>
+              <a:rPr lang="en-US" sz="2000" b="1" dirty="0">
+                <a:solidFill>
+                  <a:srgbClr val="0F8F7E"/>
+                </a:solidFill>
+                <a:latin typeface="Cambria" pitchFamily="34" charset="0"/>
+                <a:ea typeface="Cambria" pitchFamily="34" charset="-122"/>
+                <a:cs typeface="Cambria" pitchFamily="34" charset="-120"/>
+              </a:rPr>
+              <a:t>Цель</a:t>
+            </a:r>
+            <a:endParaRPr lang="en-US" sz="2000" dirty="0"/>
+          </a:p>
+        </p:txBody>
+      </p:sp>
+      <p:sp>
+        <p:nvSpPr>
+          <p:cNvPr id="5" name="Text 3"/>
+          <p:cNvSpPr txBox="1"/>
+          <p:nvPr/>
+        </p:nvSpPr>
+        <p:spPr>
+          <a:xfrm>
+            <a:off x="685800" y="1737360"/>
+            <a:ext cx="3108960" cy="2468880"/>
+          </a:xfrm>
+          <a:prstGeom prst="rect">
+            <a:avLst/>
+          </a:prstGeom>
+          <a:noFill/>
+          <a:ln/>
+        </p:spPr>
+        <p:txBody>
+          <a:bodyPr wrap="square" lIns="0" tIns="0" rIns="0" bIns="0" rtlCol="0" anchor="t"/>
+          <a:lstStyle/>
+          <a:p>
+            <a:pPr indent="0" marL="0">
+              <a:buNone/>
+            </a:pPr>
+            <a:r>
+              <a:rPr lang="en-US" sz="1500" dirty="0">
+                <a:solidFill>
+                  <a:srgbClr val="1B2437"/>
+                </a:solidFill>
+                <a:latin typeface="Calibri" pitchFamily="34" charset="0"/>
+                <a:ea typeface="Calibri" pitchFamily="34" charset="-122"/>
+                <a:cs typeface="Calibri" pitchFamily="34" charset="-120"/>
+              </a:rPr>
+              <a:t>Построить математическую модель многолучевой интерференции в интерферометре Фабри - Перо и на её основе разработать методику измерения длины световой волны.</a:t>
+            </a:r>
+            <a:endParaRPr lang="en-US" sz="1500" dirty="0"/>
+          </a:p>
+        </p:txBody>
+      </p:sp>
+      <p:sp>
+        <p:nvSpPr>
+          <p:cNvPr id="6" name="Shape 4"/>
           <p:cNvSpPr/>
           <p:nvPr/>
         </p:nvSpPr>
         <p:spPr>
           <a:xfrm>
-            <a:off x="685800" y="1463040"/>
-            <a:ext cx="548640" cy="548640"/>
+            <a:off x="4343400" y="1188720"/>
+            <a:ext cx="457200" cy="457200"/>
           </a:xfrm>
           <a:prstGeom prst="ellipse">
             <a:avLst/>
@@ -1820,14 +1898,14 @@
       </p:sp>
       <p:sp>
         <p:nvSpPr>
-          <p:cNvPr id="5" name="Text 3"/>
-          <p:cNvSpPr txBox="1"/>
-          <p:nvPr/>
-        </p:nvSpPr>
-        <p:spPr>
-          <a:xfrm>
-            <a:off x="685800" y="1463040"/>
-            <a:ext cx="548640" cy="548640"/>
+          <p:cNvPr id="7" name="Text 5"/>
+          <p:cNvSpPr txBox="1"/>
+          <p:nvPr/>
+        </p:nvSpPr>
+        <p:spPr>
+          <a:xfrm>
+            <a:off x="4343400" y="1188720"/>
+            <a:ext cx="457200" cy="457200"/>
           </a:xfrm>
           <a:prstGeom prst="rect">
             <a:avLst/>
@@ -1843,7 +1921,7 @@
               <a:buNone/>
             </a:pPr>
             <a:r>
-              <a:rPr lang="en-US" sz="2200" b="1" dirty="0">
+              <a:rPr lang="en-US" sz="1800" b="1" dirty="0">
                 <a:solidFill>
                   <a:srgbClr val="0B1220"/>
                 </a:solidFill>
@@ -1853,36 +1931,36 @@
               </a:rPr>
               <a:t>1</a:t>
             </a:r>
-            <a:endParaRPr lang="en-US" sz="2200" dirty="0"/>
-          </a:p>
-        </p:txBody>
-      </p:sp>
-      <p:sp>
-        <p:nvSpPr>
-          <p:cNvPr id="6" name="Text 4"/>
-          <p:cNvSpPr txBox="1"/>
-          <p:nvPr/>
-        </p:nvSpPr>
-        <p:spPr>
-          <a:xfrm>
-            <a:off x="685800" y="2194560"/>
-            <a:ext cx="2148840" cy="640080"/>
-          </a:xfrm>
-          <a:prstGeom prst="rect">
-            <a:avLst/>
-          </a:prstGeom>
-          <a:noFill/>
-          <a:ln/>
-        </p:spPr>
-        <p:txBody>
-          <a:bodyPr wrap="square" lIns="0" tIns="0" rIns="0" bIns="0" rtlCol="0" anchor="t"/>
-          <a:lstStyle/>
-          <a:p>
-            <a:pPr indent="0" marL="0">
-              <a:buNone/>
-            </a:pPr>
-            <a:r>
-              <a:rPr lang="en-US" sz="2000" b="1" dirty="0">
+            <a:endParaRPr lang="en-US" sz="1800" dirty="0"/>
+          </a:p>
+        </p:txBody>
+      </p:sp>
+      <p:sp>
+        <p:nvSpPr>
+          <p:cNvPr id="8" name="Text 6"/>
+          <p:cNvSpPr txBox="1"/>
+          <p:nvPr/>
+        </p:nvSpPr>
+        <p:spPr>
+          <a:xfrm>
+            <a:off x="4983480" y="1143000"/>
+            <a:ext cx="3703320" cy="292608"/>
+          </a:xfrm>
+          <a:prstGeom prst="rect">
+            <a:avLst/>
+          </a:prstGeom>
+          <a:noFill/>
+          <a:ln/>
+        </p:spPr>
+        <p:txBody>
+          <a:bodyPr wrap="square" lIns="0" tIns="0" rIns="0" bIns="0" rtlCol="0" anchor="ctr"/>
+          <a:lstStyle/>
+          <a:p>
+            <a:pPr indent="0" marL="0">
+              <a:buNone/>
+            </a:pPr>
+            <a:r>
+              <a:rPr lang="en-US" sz="1500" b="1" dirty="0">
                 <a:solidFill>
                   <a:srgbClr val="1B2437"/>
                 </a:solidFill>
@@ -1890,22 +1968,22 @@
                 <a:ea typeface="Cambria" pitchFamily="34" charset="-122"/>
                 <a:cs typeface="Cambria" pitchFamily="34" charset="-120"/>
               </a:rPr>
-              <a:t>Свет — волна</a:t>
-            </a:r>
-            <a:endParaRPr lang="en-US" sz="2000" dirty="0"/>
-          </a:p>
-        </p:txBody>
-      </p:sp>
-      <p:sp>
-        <p:nvSpPr>
-          <p:cNvPr id="7" name="Text 5"/>
-          <p:cNvSpPr txBox="1"/>
-          <p:nvPr/>
-        </p:nvSpPr>
-        <p:spPr>
-          <a:xfrm>
-            <a:off x="685800" y="2880360"/>
-            <a:ext cx="2148840" cy="1463040"/>
+              <a:t>Вывести формулу Эйри</a:t>
+            </a:r>
+            <a:endParaRPr lang="en-US" sz="1500" dirty="0"/>
+          </a:p>
+        </p:txBody>
+      </p:sp>
+      <p:sp>
+        <p:nvSpPr>
+          <p:cNvPr id="9" name="Text 7"/>
+          <p:cNvSpPr txBox="1"/>
+          <p:nvPr/>
+        </p:nvSpPr>
+        <p:spPr>
+          <a:xfrm>
+            <a:off x="4983480" y="1444752"/>
+            <a:ext cx="3703320" cy="457200"/>
           </a:xfrm>
           <a:prstGeom prst="rect">
             <a:avLst/>
@@ -1921,7 +1999,7 @@
               <a:buNone/>
             </a:pPr>
             <a:r>
-              <a:rPr lang="en-US" sz="1400" dirty="0">
+              <a:rPr lang="en-US" sz="1200" dirty="0">
                 <a:solidFill>
                   <a:srgbClr val="5B6678"/>
                 </a:solidFill>
@@ -1929,49 +2007,22 @@
                 <a:ea typeface="Calibri" pitchFamily="34" charset="-122"/>
                 <a:cs typeface="Calibri" pitchFamily="34" charset="-120"/>
               </a:rPr>
-              <a:t>Две световые волны могут погасить друг друга. Так возникают светлые и тёмные кольца: только волны так себя ведут.</a:t>
-            </a:r>
-            <a:endParaRPr lang="en-US" sz="1400" dirty="0"/>
-          </a:p>
-        </p:txBody>
-      </p:sp>
-      <p:sp>
-        <p:nvSpPr>
-          <p:cNvPr id="8" name="Shape 6"/>
+              <a:t>и получить характеристики прибора: дисперсию, ширину пика, резкость, разрешение</a:t>
+            </a:r>
+            <a:endParaRPr lang="en-US" sz="1200" dirty="0"/>
+          </a:p>
+        </p:txBody>
+      </p:sp>
+      <p:sp>
+        <p:nvSpPr>
+          <p:cNvPr id="10" name="Shape 8"/>
           <p:cNvSpPr/>
           <p:nvPr/>
         </p:nvSpPr>
         <p:spPr>
           <a:xfrm>
-            <a:off x="3246120" y="1234440"/>
-            <a:ext cx="2606040" cy="3200400"/>
-          </a:xfrm>
-          <a:prstGeom prst="roundRect">
-            <a:avLst>
-              <a:gd name="adj" fmla="val 4211"/>
-            </a:avLst>
-          </a:prstGeom>
-          <a:solidFill>
-            <a:srgbClr val="EEF3F8"/>
-          </a:solidFill>
-          <a:ln w="12700">
-            <a:solidFill>
-              <a:srgbClr val="EEF3F8"/>
-            </a:solidFill>
-            <a:prstDash val="solid"/>
-          </a:ln>
-        </p:spPr>
-      </p:sp>
-      <p:sp>
-        <p:nvSpPr>
-          <p:cNvPr id="9" name="Shape 7"/>
-          <p:cNvSpPr/>
-          <p:nvPr/>
-        </p:nvSpPr>
-        <p:spPr>
-          <a:xfrm>
-            <a:off x="3474720" y="1463040"/>
-            <a:ext cx="548640" cy="548640"/>
+            <a:off x="4343400" y="2011680"/>
+            <a:ext cx="457200" cy="457200"/>
           </a:xfrm>
           <a:prstGeom prst="ellipse">
             <a:avLst/>
@@ -1989,14 +2040,14 @@
       </p:sp>
       <p:sp>
         <p:nvSpPr>
-          <p:cNvPr id="10" name="Text 8"/>
-          <p:cNvSpPr txBox="1"/>
-          <p:nvPr/>
-        </p:nvSpPr>
-        <p:spPr>
-          <a:xfrm>
-            <a:off x="3474720" y="1463040"/>
-            <a:ext cx="548640" cy="548640"/>
+          <p:cNvPr id="11" name="Text 9"/>
+          <p:cNvSpPr txBox="1"/>
+          <p:nvPr/>
+        </p:nvSpPr>
+        <p:spPr>
+          <a:xfrm>
+            <a:off x="4343400" y="2011680"/>
+            <a:ext cx="457200" cy="457200"/>
           </a:xfrm>
           <a:prstGeom prst="rect">
             <a:avLst/>
@@ -2012,7 +2063,7 @@
               <a:buNone/>
             </a:pPr>
             <a:r>
-              <a:rPr lang="en-US" sz="2200" b="1" dirty="0">
+              <a:rPr lang="en-US" sz="1800" b="1" dirty="0">
                 <a:solidFill>
                   <a:srgbClr val="0B1220"/>
                 </a:solidFill>
@@ -2022,36 +2073,36 @@
               </a:rPr>
               <a:t>2</a:t>
             </a:r>
-            <a:endParaRPr lang="en-US" sz="2200" dirty="0"/>
-          </a:p>
-        </p:txBody>
-      </p:sp>
-      <p:sp>
-        <p:nvSpPr>
-          <p:cNvPr id="11" name="Text 9"/>
-          <p:cNvSpPr txBox="1"/>
-          <p:nvPr/>
-        </p:nvSpPr>
-        <p:spPr>
-          <a:xfrm>
-            <a:off x="3474720" y="2194560"/>
-            <a:ext cx="2148840" cy="640080"/>
-          </a:xfrm>
-          <a:prstGeom prst="rect">
-            <a:avLst/>
-          </a:prstGeom>
-          <a:noFill/>
-          <a:ln/>
-        </p:spPr>
-        <p:txBody>
-          <a:bodyPr wrap="square" lIns="0" tIns="0" rIns="0" bIns="0" rtlCol="0" anchor="t"/>
-          <a:lstStyle/>
-          <a:p>
-            <a:pPr indent="0" marL="0">
-              <a:buNone/>
-            </a:pPr>
-            <a:r>
-              <a:rPr lang="en-US" sz="2000" b="1" dirty="0">
+            <a:endParaRPr lang="en-US" sz="1800" dirty="0"/>
+          </a:p>
+        </p:txBody>
+      </p:sp>
+      <p:sp>
+        <p:nvSpPr>
+          <p:cNvPr id="12" name="Text 10"/>
+          <p:cNvSpPr txBox="1"/>
+          <p:nvPr/>
+        </p:nvSpPr>
+        <p:spPr>
+          <a:xfrm>
+            <a:off x="4983480" y="1965960"/>
+            <a:ext cx="3703320" cy="292608"/>
+          </a:xfrm>
+          <a:prstGeom prst="rect">
+            <a:avLst/>
+          </a:prstGeom>
+          <a:noFill/>
+          <a:ln/>
+        </p:spPr>
+        <p:txBody>
+          <a:bodyPr wrap="square" lIns="0" tIns="0" rIns="0" bIns="0" rtlCol="0" anchor="ctr"/>
+          <a:lstStyle/>
+          <a:p>
+            <a:pPr indent="0" marL="0">
+              <a:buNone/>
+            </a:pPr>
+            <a:r>
+              <a:rPr lang="en-US" sz="1500" b="1" dirty="0">
                 <a:solidFill>
                   <a:srgbClr val="1B2437"/>
                 </a:solidFill>
@@ -2059,22 +2110,22 @@
                 <a:ea typeface="Cambria" pitchFamily="34" charset="-122"/>
                 <a:cs typeface="Cambria" pitchFamily="34" charset="-120"/>
               </a:rPr>
-              <a:t>Кольца меряют длину волны</a:t>
-            </a:r>
-            <a:endParaRPr lang="en-US" sz="2000" dirty="0"/>
-          </a:p>
-        </p:txBody>
-      </p:sp>
-      <p:sp>
-        <p:nvSpPr>
-          <p:cNvPr id="12" name="Text 10"/>
-          <p:cNvSpPr txBox="1"/>
-          <p:nvPr/>
-        </p:nvSpPr>
-        <p:spPr>
-          <a:xfrm>
-            <a:off x="3474720" y="2880360"/>
-            <a:ext cx="2148840" cy="1463040"/>
+              <a:t>Получить закон радиусов колец</a:t>
+            </a:r>
+            <a:endParaRPr lang="en-US" sz="1500" dirty="0"/>
+          </a:p>
+        </p:txBody>
+      </p:sp>
+      <p:sp>
+        <p:nvSpPr>
+          <p:cNvPr id="13" name="Text 11"/>
+          <p:cNvSpPr txBox="1"/>
+          <p:nvPr/>
+        </p:nvSpPr>
+        <p:spPr>
+          <a:xfrm>
+            <a:off x="4983480" y="2267712"/>
+            <a:ext cx="3703320" cy="457200"/>
           </a:xfrm>
           <a:prstGeom prst="rect">
             <a:avLst/>
@@ -2090,7 +2141,7 @@
               <a:buNone/>
             </a:pPr>
             <a:r>
-              <a:rPr lang="en-US" sz="1400" dirty="0">
+              <a:rPr lang="en-US" sz="1200" dirty="0">
                 <a:solidFill>
                   <a:srgbClr val="5B6678"/>
                 </a:solidFill>
@@ -2098,38 +2149,11 @@
                 <a:ea typeface="Calibri" pitchFamily="34" charset="-122"/>
                 <a:cs typeface="Calibri" pitchFamily="34" charset="-120"/>
               </a:rPr>
-              <a:t>По расстоянию между кольцами находят длину световой волны с точностью до долей процента.</a:t>
-            </a:r>
-            <a:endParaRPr lang="en-US" sz="1400" dirty="0"/>
-          </a:p>
-        </p:txBody>
-      </p:sp>
-      <p:sp>
-        <p:nvSpPr>
-          <p:cNvPr id="13" name="Shape 11"/>
-          <p:cNvSpPr/>
-          <p:nvPr/>
-        </p:nvSpPr>
-        <p:spPr>
-          <a:xfrm>
-            <a:off x="6035040" y="1234440"/>
-            <a:ext cx="2606040" cy="3200400"/>
-          </a:xfrm>
-          <a:prstGeom prst="roundRect">
-            <a:avLst>
-              <a:gd name="adj" fmla="val 4211"/>
-            </a:avLst>
-          </a:prstGeom>
-          <a:solidFill>
-            <a:srgbClr val="EEF3F8"/>
-          </a:solidFill>
-          <a:ln w="12700">
-            <a:solidFill>
-              <a:srgbClr val="EEF3F8"/>
-            </a:solidFill>
-            <a:prstDash val="solid"/>
-          </a:ln>
-        </p:spPr>
+              <a:t>равного наклона и доказать равенство площадей зон</a:t>
+            </a:r>
+            <a:endParaRPr lang="en-US" sz="1200" dirty="0"/>
+          </a:p>
+        </p:txBody>
       </p:sp>
       <p:sp>
         <p:nvSpPr>
@@ -2139,8 +2163,8 @@
         </p:nvSpPr>
         <p:spPr>
           <a:xfrm>
-            <a:off x="6263640" y="1463040"/>
-            <a:ext cx="548640" cy="548640"/>
+            <a:off x="4343400" y="2834640"/>
+            <a:ext cx="457200" cy="457200"/>
           </a:xfrm>
           <a:prstGeom prst="ellipse">
             <a:avLst/>
@@ -2164,8 +2188,8 @@
         </p:nvSpPr>
         <p:spPr>
           <a:xfrm>
-            <a:off x="6263640" y="1463040"/>
-            <a:ext cx="548640" cy="548640"/>
+            <a:off x="4343400" y="2834640"/>
+            <a:ext cx="457200" cy="457200"/>
           </a:xfrm>
           <a:prstGeom prst="rect">
             <a:avLst/>
@@ -2181,7 +2205,7 @@
               <a:buNone/>
             </a:pPr>
             <a:r>
-              <a:rPr lang="en-US" sz="2200" b="1" dirty="0">
+              <a:rPr lang="en-US" sz="1800" b="1" dirty="0">
                 <a:solidFill>
                   <a:srgbClr val="0B1220"/>
                 </a:solidFill>
@@ -2191,7 +2215,7 @@
               </a:rPr>
               <a:t>3</a:t>
             </a:r>
-            <a:endParaRPr lang="en-US" sz="2200" dirty="0"/>
+            <a:endParaRPr lang="en-US" sz="1800" dirty="0"/>
           </a:p>
         </p:txBody>
       </p:sp>
@@ -2203,24 +2227,24 @@
         </p:nvSpPr>
         <p:spPr>
           <a:xfrm>
-            <a:off x="6263640" y="2194560"/>
-            <a:ext cx="2148840" cy="640080"/>
-          </a:xfrm>
-          <a:prstGeom prst="rect">
-            <a:avLst/>
-          </a:prstGeom>
-          <a:noFill/>
-          <a:ln/>
-        </p:spPr>
-        <p:txBody>
-          <a:bodyPr wrap="square" lIns="0" tIns="0" rIns="0" bIns="0" rtlCol="0" anchor="t"/>
-          <a:lstStyle/>
-          <a:p>
-            <a:pPr indent="0" marL="0">
-              <a:buNone/>
-            </a:pPr>
-            <a:r>
-              <a:rPr lang="en-US" sz="2000" b="1" dirty="0">
+            <a:off x="4983480" y="2788920"/>
+            <a:ext cx="3703320" cy="292608"/>
+          </a:xfrm>
+          <a:prstGeom prst="rect">
+            <a:avLst/>
+          </a:prstGeom>
+          <a:noFill/>
+          <a:ln/>
+        </p:spPr>
+        <p:txBody>
+          <a:bodyPr wrap="square" lIns="0" tIns="0" rIns="0" bIns="0" rtlCol="0" anchor="ctr"/>
+          <a:lstStyle/>
+          <a:p>
+            <a:pPr indent="0" marL="0">
+              <a:buNone/>
+            </a:pPr>
+            <a:r>
+              <a:rPr lang="en-US" sz="1500" b="1" dirty="0">
                 <a:solidFill>
                   <a:srgbClr val="1B2437"/>
                 </a:solidFill>
@@ -2228,9 +2252,9 @@
                 <a:ea typeface="Cambria" pitchFamily="34" charset="-122"/>
                 <a:cs typeface="Cambria" pitchFamily="34" charset="-120"/>
               </a:rPr>
-              <a:t>Но прибор дорог</a:t>
-            </a:r>
-            <a:endParaRPr lang="en-US" sz="2000" dirty="0"/>
+              <a:t>Определить границы применимости</a:t>
+            </a:r>
+            <a:endParaRPr lang="en-US" sz="1500" dirty="0"/>
           </a:p>
         </p:txBody>
       </p:sp>
@@ -2242,8 +2266,8 @@
         </p:nvSpPr>
         <p:spPr>
           <a:xfrm>
-            <a:off x="6263640" y="2880360"/>
-            <a:ext cx="2148840" cy="1463040"/>
+            <a:off x="4983480" y="3090672"/>
+            <a:ext cx="3703320" cy="457200"/>
           </a:xfrm>
           <a:prstGeom prst="rect">
             <a:avLst/>
@@ -2259,7 +2283,7 @@
               <a:buNone/>
             </a:pPr>
             <a:r>
-              <a:rPr lang="en-US" sz="1400" dirty="0">
+              <a:rPr lang="en-US" sz="1200" dirty="0">
                 <a:solidFill>
                   <a:srgbClr val="5B6678"/>
                 </a:solidFill>
@@ -2267,22 +2291,47 @@
                 <a:ea typeface="Calibri" pitchFamily="34" charset="-122"/>
                 <a:cs typeface="Calibri" pitchFamily="34" charset="-120"/>
               </a:rPr>
-              <a:t>Настоящий интерферометр — сложная установка, в учебной лаборатории её мало. Поэтому мы сделали модель.</a:t>
-            </a:r>
-            <a:endParaRPr lang="en-US" sz="1400" dirty="0"/>
-          </a:p>
-        </p:txBody>
-      </p:sp>
-      <p:sp>
-        <p:nvSpPr>
-          <p:cNvPr id="18" name="Text 16"/>
-          <p:cNvSpPr txBox="1"/>
-          <p:nvPr/>
-        </p:nvSpPr>
-        <p:spPr>
-          <a:xfrm>
-            <a:off x="457200" y="4800600"/>
-            <a:ext cx="6400800" cy="228600"/>
+              <a:t>модели: допущения, малые углы, расфокусировка экрана</a:t>
+            </a:r>
+            <a:endParaRPr lang="en-US" sz="1200" dirty="0"/>
+          </a:p>
+        </p:txBody>
+      </p:sp>
+      <p:sp>
+        <p:nvSpPr>
+          <p:cNvPr id="18" name="Shape 16"/>
+          <p:cNvSpPr/>
+          <p:nvPr/>
+        </p:nvSpPr>
+        <p:spPr>
+          <a:xfrm>
+            <a:off x="4343400" y="3657600"/>
+            <a:ext cx="457200" cy="457200"/>
+          </a:xfrm>
+          <a:prstGeom prst="ellipse">
+            <a:avLst/>
+          </a:prstGeom>
+          <a:solidFill>
+            <a:srgbClr val="22C7B0"/>
+          </a:solidFill>
+          <a:ln w="12700">
+            <a:solidFill>
+              <a:srgbClr val="22C7B0"/>
+            </a:solidFill>
+            <a:prstDash val="solid"/>
+          </a:ln>
+        </p:spPr>
+      </p:sp>
+      <p:sp>
+        <p:nvSpPr>
+          <p:cNvPr id="19" name="Text 17"/>
+          <p:cNvSpPr txBox="1"/>
+          <p:nvPr/>
+        </p:nvSpPr>
+        <p:spPr>
+          <a:xfrm>
+            <a:off x="4343400" y="3657600"/>
+            <a:ext cx="457200" cy="457200"/>
           </a:xfrm>
           <a:prstGeom prst="rect">
             <a:avLst/>
@@ -2294,11 +2343,89 @@
           <a:bodyPr wrap="square" lIns="0" tIns="0" rIns="0" bIns="0" rtlCol="0" anchor="ctr"/>
           <a:lstStyle/>
           <a:p>
-            <a:pPr indent="0" marL="0">
-              <a:buNone/>
-            </a:pPr>
-            <a:r>
-              <a:rPr lang="en-US" sz="1000" dirty="0">
+            <a:pPr algn="ctr" indent="0" marL="0">
+              <a:buNone/>
+            </a:pPr>
+            <a:r>
+              <a:rPr lang="en-US" sz="1800" b="1" dirty="0">
+                <a:solidFill>
+                  <a:srgbClr val="0B1220"/>
+                </a:solidFill>
+                <a:latin typeface="Cambria" pitchFamily="34" charset="0"/>
+                <a:ea typeface="Cambria" pitchFamily="34" charset="-122"/>
+                <a:cs typeface="Cambria" pitchFamily="34" charset="-120"/>
+              </a:rPr>
+              <a:t>4</a:t>
+            </a:r>
+            <a:endParaRPr lang="en-US" sz="1800" dirty="0"/>
+          </a:p>
+        </p:txBody>
+      </p:sp>
+      <p:sp>
+        <p:nvSpPr>
+          <p:cNvPr id="20" name="Text 18"/>
+          <p:cNvSpPr txBox="1"/>
+          <p:nvPr/>
+        </p:nvSpPr>
+        <p:spPr>
+          <a:xfrm>
+            <a:off x="4983480" y="3611880"/>
+            <a:ext cx="3703320" cy="292608"/>
+          </a:xfrm>
+          <a:prstGeom prst="rect">
+            <a:avLst/>
+          </a:prstGeom>
+          <a:noFill/>
+          <a:ln/>
+        </p:spPr>
+        <p:txBody>
+          <a:bodyPr wrap="square" lIns="0" tIns="0" rIns="0" bIns="0" rtlCol="0" anchor="ctr"/>
+          <a:lstStyle/>
+          <a:p>
+            <a:pPr indent="0" marL="0">
+              <a:buNone/>
+            </a:pPr>
+            <a:r>
+              <a:rPr lang="en-US" sz="1500" b="1" dirty="0">
+                <a:solidFill>
+                  <a:srgbClr val="1B2437"/>
+                </a:solidFill>
+                <a:latin typeface="Cambria" pitchFamily="34" charset="0"/>
+                <a:ea typeface="Cambria" pitchFamily="34" charset="-122"/>
+                <a:cs typeface="Cambria" pitchFamily="34" charset="-120"/>
+              </a:rPr>
+              <a:t>Разработать три способа измерения</a:t>
+            </a:r>
+            <a:endParaRPr lang="en-US" sz="1500" dirty="0"/>
+          </a:p>
+        </p:txBody>
+      </p:sp>
+      <p:sp>
+        <p:nvSpPr>
+          <p:cNvPr id="21" name="Text 19"/>
+          <p:cNvSpPr txBox="1"/>
+          <p:nvPr/>
+        </p:nvSpPr>
+        <p:spPr>
+          <a:xfrm>
+            <a:off x="4983480" y="3913632"/>
+            <a:ext cx="3703320" cy="457200"/>
+          </a:xfrm>
+          <a:prstGeom prst="rect">
+            <a:avLst/>
+          </a:prstGeom>
+          <a:noFill/>
+          <a:ln/>
+        </p:spPr>
+        <p:txBody>
+          <a:bodyPr wrap="square" lIns="0" tIns="0" rIns="0" bIns="0" rtlCol="0" anchor="t"/>
+          <a:lstStyle/>
+          <a:p>
+            <a:pPr indent="0" marL="0">
+              <a:buNone/>
+            </a:pPr>
+            <a:r>
+              <a:rPr lang="en-US" sz="1200" dirty="0">
                 <a:solidFill>
                   <a:srgbClr val="5B6678"/>
                 </a:solidFill>
@@ -2306,7 +2433,46 @@
                 <a:ea typeface="Calibri" pitchFamily="34" charset="-122"/>
                 <a:cs typeface="Calibri" pitchFamily="34" charset="-120"/>
               </a:rPr>
-              <a:t>Интерферометр Фабри — Перо · проект СЭЛФ, МГТУ им. Н. Э. Баумана</a:t>
+              <a:t>длины волны с обработкой методом наименьших квадратов</a:t>
+            </a:r>
+            <a:endParaRPr lang="en-US" sz="1200" dirty="0"/>
+          </a:p>
+        </p:txBody>
+      </p:sp>
+      <p:sp>
+        <p:nvSpPr>
+          <p:cNvPr id="22" name="Text 20"/>
+          <p:cNvSpPr txBox="1"/>
+          <p:nvPr/>
+        </p:nvSpPr>
+        <p:spPr>
+          <a:xfrm>
+            <a:off x="457200" y="4800600"/>
+            <a:ext cx="6400800" cy="228600"/>
+          </a:xfrm>
+          <a:prstGeom prst="rect">
+            <a:avLst/>
+          </a:prstGeom>
+          <a:noFill/>
+          <a:ln/>
+        </p:spPr>
+        <p:txBody>
+          <a:bodyPr wrap="square" lIns="0" tIns="0" rIns="0" bIns="0" rtlCol="0" anchor="ctr"/>
+          <a:lstStyle/>
+          <a:p>
+            <a:pPr indent="0" marL="0">
+              <a:buNone/>
+            </a:pPr>
+            <a:r>
+              <a:rPr lang="en-US" sz="1000" dirty="0">
+                <a:solidFill>
+                  <a:srgbClr val="5B6678"/>
+                </a:solidFill>
+                <a:latin typeface="Calibri" pitchFamily="34" charset="0"/>
+                <a:ea typeface="Calibri" pitchFamily="34" charset="-122"/>
+                <a:cs typeface="Calibri" pitchFamily="34" charset="-120"/>
+              </a:rPr>
+              <a:t>Интерферометр Фабри - Перо · проект СЭЛФ, МГТУ им. Н. Э. Баумана</a:t>
             </a:r>
             <a:endParaRPr lang="en-US" sz="1000" dirty="0"/>
           </a:p>
@@ -2314,7 +2480,7 @@
       </p:sp>
       <p:sp>
         <p:nvSpPr>
-          <p:cNvPr id="19" name="Text 17"/>
+          <p:cNvPr id="23" name="Text 21"/>
           <p:cNvSpPr txBox="1"/>
           <p:nvPr/>
         </p:nvSpPr>
@@ -2842,7 +3008,7 @@
                 <a:ea typeface="Calibri" pitchFamily="34" charset="-122"/>
                 <a:cs typeface="Calibri" pitchFamily="34" charset="-120"/>
               </a:rPr>
-              <a:t>T = |E|² даёт формулу Эйри; F = 4R/(1 − R)² — коэффициент резкости.</a:t>
+              <a:t>T = |E|² даёт формулу Эйри; F = 4R/(1 − R)² - коэффициент резкости.</a:t>
             </a:r>
             <a:endParaRPr lang="en-US" sz="1300" dirty="0"/>
           </a:p>
@@ -2944,7 +3110,7 @@
                 <a:ea typeface="Calibri" pitchFamily="34" charset="-122"/>
                 <a:cs typeface="Calibri" pitchFamily="34" charset="-120"/>
               </a:rPr>
-              <a:t>Максимумы — при δ = 2πm, то есть 2nd·cosθ = mλ. He-Ne лазер 632,8 нм, зазор 5 мм, R = 0,9</a:t>
+              <a:t>Максимумы - при δ = 2πm, то есть 2nd·cosθ = mλ. He-Ne лазер 632,8 нм, зазор 5 мм, R = 0,9</a:t>
             </a:r>
             <a:endParaRPr lang="en-US" sz="1100" dirty="0"/>
           </a:p>
@@ -2983,7 +3149,7 @@
                 <a:ea typeface="Calibri" pitchFamily="34" charset="-122"/>
                 <a:cs typeface="Calibri" pitchFamily="34" charset="-120"/>
               </a:rPr>
-              <a:t>Интерферометр Фабри — Перо · проект СЭЛФ, МГТУ им. Н. Э. Баумана</a:t>
+              <a:t>Интерферометр Фабри - Перо · проект СЭЛФ, МГТУ им. Н. Э. Баумана</a:t>
             </a:r>
             <a:endParaRPr lang="en-US" sz="1000" dirty="0"/>
           </a:p>
@@ -3381,7 +3547,7 @@
                 <a:ea typeface="Calibri" pitchFamily="34" charset="-122"/>
                 <a:cs typeface="Calibri" pitchFamily="34" charset="-120"/>
               </a:rPr>
-              <a:t>ширина пика, 𝓕 — резкость</a:t>
+              <a:t>ширина пика, 𝓕 - резкость</a:t>
             </a:r>
             <a:endParaRPr lang="en-US" sz="1200" dirty="0"/>
           </a:p>
@@ -3747,7 +3913,7 @@
                 <a:ea typeface="Calibri" pitchFamily="34" charset="-122"/>
                 <a:cs typeface="Calibri" pitchFamily="34" charset="-120"/>
               </a:rPr>
-              <a:t>Интерферометр Фабри — Перо · проект СЭЛФ, МГТУ им. Н. Э. Баумана</a:t>
+              <a:t>Интерферометр Фабри - Перо · проект СЭЛФ, МГТУ им. Н. Э. Баумана</a:t>
             </a:r>
             <a:endParaRPr lang="en-US" sz="1000" dirty="0"/>
           </a:p>
@@ -3999,7 +4165,7 @@
                 <a:ea typeface="Calibri" pitchFamily="34" charset="-122"/>
                 <a:cs typeface="Calibri" pitchFamily="34" charset="-120"/>
               </a:rPr>
-              <a:t>ε — дробная часть порядка в центре (для He-Ne: 0,78)</a:t>
+              <a:t>ε - дробная часть порядка в центре (для He-Ne: 0,78)</a:t>
             </a:r>
             <a:endParaRPr lang="en-US" sz="1400" dirty="0"/>
           </a:p>
@@ -4287,7 +4453,7 @@
                 <a:ea typeface="Calibri" pitchFamily="34" charset="-122"/>
                 <a:cs typeface="Calibri" pitchFamily="34" charset="-120"/>
               </a:rPr>
-              <a:t>Интерферометр Фабри — Перо · проект СЭЛФ, МГТУ им. Н. Э. Баумана</a:t>
+              <a:t>Интерферометр Фабри - Перо · проект СЭЛФ, МГТУ им. Н. Э. Баумана</a:t>
             </a:r>
             <a:endParaRPr lang="en-US" sz="1000" dirty="0"/>
           </a:p>
@@ -4672,7 +4838,7 @@
                 <a:ea typeface="Calibri" pitchFamily="34" charset="-122"/>
                 <a:cs typeface="Calibri" pitchFamily="34" charset="-120"/>
               </a:rPr>
-              <a:t>Пятно Пуассона — дифракция на диске; у нас — сложение лучей между зеркалами</a:t>
+              <a:t>Пятно Пуассона - дифракция на диске; у нас - сложение лучей между зеркалами</a:t>
             </a:r>
             <a:endParaRPr lang="en-US" sz="1300" dirty="0"/>
           </a:p>
@@ -4732,7 +4898,7 @@
                 <a:ea typeface="Calibri" pitchFamily="34" charset="-122"/>
                 <a:cs typeface="Calibri" pitchFamily="34" charset="-120"/>
               </a:rPr>
-              <a:t>Интерферометр Фабри — Перо · проект СЭЛФ, МГТУ им. Н. Э. Баумана</a:t>
+              <a:t>Интерферометр Фабри - Перо · проект СЭЛФ, МГТУ им. Н. Э. Баумана</a:t>
             </a:r>
             <a:endParaRPr lang="en-US" sz="1000" dirty="0"/>
           </a:p>
@@ -5196,7 +5362,7 @@
                 <a:ea typeface="Calibri" pitchFamily="34" charset="-122"/>
                 <a:cs typeface="Calibri" pitchFamily="34" charset="-120"/>
               </a:rPr>
-              <a:t>Прямая проводится методом наименьших квадратов, погрешность — по коэффициенту Стьюдента. Пример: скрытая λ = 454,6 нм, найдено (456,7 ± 2,3) нм — ошибка около 0,5 %</a:t>
+              <a:t>Прямая проводится методом наименьших квадратов, погрешность - по коэффициенту Стьюдента. Пример: скрытая λ = 454,6 нм, найдено (456,7 ± 2,3) нм - ошибка около 0,5 %</a:t>
             </a:r>
             <a:endParaRPr lang="en-US" sz="1300" dirty="0"/>
           </a:p>
@@ -5298,7 +5464,7 @@
                 <a:ea typeface="Calibri" pitchFamily="34" charset="-122"/>
                 <a:cs typeface="Calibri" pitchFamily="34" charset="-120"/>
               </a:rPr>
-              <a:t>Интерферометр Фабри — Перо · проект СЭЛФ, МГТУ им. Н. Э. Баумана</a:t>
+              <a:t>Интерферометр Фабри - Перо · проект СЭЛФ, МГТУ им. Н. Э. Баумана</a:t>
             </a:r>
             <a:endParaRPr lang="en-US" sz="1000" dirty="0"/>
           </a:p>
@@ -5879,7 +6045,7 @@
                 <a:ea typeface="Calibri" pitchFamily="34" charset="-122"/>
                 <a:cs typeface="Calibri" pitchFamily="34" charset="-120"/>
               </a:rPr>
-              <a:t>Интерферометр Фабри — Перо · проект СЭЛФ, МГТУ им. Н. Э. Баумана</a:t>
+              <a:t>Интерферометр Фабри - Перо · проект СЭЛФ, МГТУ им. Н. Э. Баумана</a:t>
             </a:r>
             <a:endParaRPr lang="en-US" sz="1000" dirty="0"/>
           </a:p>
